--- a/Development_Process/Week_10/Process_Report.pptx
+++ b/Development_Process/Week_10/Process_Report.pptx
@@ -8,8 +8,7 @@
     <p:sldId id="256" r:id="rId2"/>
     <p:sldId id="258" r:id="rId3"/>
     <p:sldId id="259" r:id="rId4"/>
-    <p:sldId id="260" r:id="rId5"/>
-    <p:sldId id="261" r:id="rId6"/>
+    <p:sldId id="261" r:id="rId5"/>
   </p:sldIdLst>
   <p:sldSz cx="12192000" cy="6858000"/>
   <p:notesSz cx="6858000" cy="9144000"/>
@@ -108,6 +107,11 @@
       </a:defRPr>
     </a:lvl9pPr>
   </p:defaultTextStyle>
+  <p:extLst>
+    <p:ext uri="{EFAFB233-063F-42B5-8137-9DF3F51BA10A}">
+      <p15:sldGuideLst xmlns:p15="http://schemas.microsoft.com/office/powerpoint/2012/main"/>
+    </p:ext>
+  </p:extLst>
 </p:presentation>
 </file>
 
@@ -4686,658 +4690,158 @@
           <a:lstStyle/>
           <a:p>
             <a:r>
-              <a:rPr lang="en-US" dirty="0" err="1"/>
-              <a:t>Xác</a:t>
-            </a:r>
-            <a:r>
-              <a:rPr lang="en-US" dirty="0"/>
-              <a:t> </a:t>
-            </a:r>
-            <a:r>
-              <a:rPr lang="en-US" dirty="0" err="1"/>
-              <a:t>định</a:t>
-            </a:r>
-            <a:r>
-              <a:rPr lang="en-US" dirty="0"/>
-              <a:t> </a:t>
-            </a:r>
-            <a:r>
-              <a:rPr lang="en-US" dirty="0" err="1"/>
-              <a:t>vấn</a:t>
-            </a:r>
-            <a:r>
-              <a:rPr lang="en-US" dirty="0"/>
-              <a:t> </a:t>
-            </a:r>
-            <a:r>
-              <a:rPr lang="en-US" dirty="0" err="1"/>
-              <a:t>đề</a:t>
+              <a:rPr lang="en-US" dirty="0"/>
+              <a:t>Platform PoC</a:t>
+            </a:r>
+          </a:p>
+        </p:txBody>
+      </p:sp>
+      <p:sp>
+        <p:nvSpPr>
+          <p:cNvPr id="3" name="Content Placeholder 2">
+            <a:extLst>
+              <a:ext uri="{FF2B5EF4-FFF2-40B4-BE49-F238E27FC236}">
+                <a16:creationId xmlns:a16="http://schemas.microsoft.com/office/drawing/2014/main" id="{B2FF96FF-84F0-4A67-AE9F-4B8930BB64F9}"/>
+              </a:ext>
+            </a:extLst>
+          </p:cNvPr>
+          <p:cNvSpPr>
+            <a:spLocks noGrp="1"/>
+          </p:cNvSpPr>
+          <p:nvPr>
+            <p:ph idx="1"/>
+          </p:nvPr>
+        </p:nvSpPr>
+        <p:spPr/>
+        <p:txBody>
+          <a:bodyPr>
+            <a:normAutofit lnSpcReduction="10000"/>
+          </a:bodyPr>
+          <a:lstStyle/>
+          <a:p>
+            <a:r>
+              <a:rPr lang="en-US" dirty="0" err="1"/>
+              <a:t>Công</a:t>
+            </a:r>
+            <a:r>
+              <a:rPr lang="en-US" dirty="0"/>
+              <a:t> </a:t>
+            </a:r>
+            <a:r>
+              <a:rPr lang="en-US" dirty="0" err="1"/>
+              <a:t>nghệ</a:t>
+            </a:r>
+            <a:r>
+              <a:rPr lang="en-US" dirty="0"/>
+              <a:t> </a:t>
+            </a:r>
+            <a:r>
+              <a:rPr lang="en-US" dirty="0" err="1"/>
+              <a:t>và</a:t>
+            </a:r>
+            <a:r>
+              <a:rPr lang="en-US" dirty="0"/>
+              <a:t> repo </a:t>
+            </a:r>
+            <a:r>
+              <a:rPr lang="en-US" dirty="0" err="1"/>
+              <a:t>áp</a:t>
+            </a:r>
+            <a:r>
+              <a:rPr lang="en-US" dirty="0"/>
+              <a:t> </a:t>
+            </a:r>
+            <a:r>
+              <a:rPr lang="en-US" dirty="0" err="1"/>
+              <a:t>dụng</a:t>
             </a:r>
             <a:endParaRPr lang="en-US" dirty="0"/>
           </a:p>
-        </p:txBody>
-      </p:sp>
-      <p:sp>
-        <p:nvSpPr>
-          <p:cNvPr id="3" name="Content Placeholder 2">
-            <a:extLst>
-              <a:ext uri="{FF2B5EF4-FFF2-40B4-BE49-F238E27FC236}">
-                <a16:creationId xmlns:a16="http://schemas.microsoft.com/office/drawing/2014/main" id="{B2FF96FF-84F0-4A67-AE9F-4B8930BB64F9}"/>
-              </a:ext>
-            </a:extLst>
-          </p:cNvPr>
-          <p:cNvSpPr>
-            <a:spLocks noGrp="1"/>
-          </p:cNvSpPr>
-          <p:nvPr>
-            <p:ph idx="1"/>
-          </p:nvPr>
-        </p:nvSpPr>
-        <p:spPr/>
-        <p:txBody>
-          <a:bodyPr/>
-          <a:lstStyle/>
-          <a:p>
-            <a:r>
-              <a:rPr lang="en-US" dirty="0" err="1"/>
-              <a:t>Quy</a:t>
-            </a:r>
-            <a:r>
-              <a:rPr lang="en-US" dirty="0"/>
-              <a:t> </a:t>
-            </a:r>
-            <a:r>
-              <a:rPr lang="en-US" dirty="0" err="1"/>
-              <a:t>mô</a:t>
-            </a:r>
-            <a:r>
-              <a:rPr lang="en-US" dirty="0"/>
-              <a:t> </a:t>
-            </a:r>
-            <a:r>
-              <a:rPr lang="en-US" dirty="0" err="1"/>
-              <a:t>vấn</a:t>
-            </a:r>
-            <a:r>
-              <a:rPr lang="en-US" dirty="0"/>
-              <a:t> </a:t>
-            </a:r>
-            <a:r>
-              <a:rPr lang="en-US" dirty="0" err="1"/>
-              <a:t>đề</a:t>
-            </a:r>
-            <a:r>
-              <a:rPr lang="en-US" dirty="0"/>
-              <a:t> </a:t>
-            </a:r>
-            <a:r>
-              <a:rPr lang="en-US" dirty="0" err="1"/>
-              <a:t>thực</a:t>
-            </a:r>
-            <a:r>
-              <a:rPr lang="en-US" dirty="0"/>
-              <a:t> </a:t>
-            </a:r>
-            <a:r>
-              <a:rPr lang="en-US" dirty="0" err="1"/>
-              <a:t>hiện</a:t>
-            </a:r>
-            <a:r>
-              <a:rPr lang="en-US" dirty="0"/>
-              <a:t> </a:t>
-            </a:r>
-            <a:r>
-              <a:rPr lang="en-US" dirty="0" err="1"/>
-              <a:t>là</a:t>
-            </a:r>
-            <a:r>
-              <a:rPr lang="en-US" dirty="0"/>
-              <a:t> </a:t>
-            </a:r>
-            <a:r>
-              <a:rPr lang="en-US" dirty="0" err="1"/>
-              <a:t>gì</a:t>
-            </a:r>
-            <a:r>
-              <a:rPr lang="en-US" dirty="0"/>
-              <a:t>?</a:t>
-            </a:r>
-          </a:p>
-          <a:p>
-            <a:r>
-              <a:rPr lang="en-US" dirty="0" err="1"/>
-              <a:t>Các</a:t>
-            </a:r>
-            <a:r>
-              <a:rPr lang="en-US" dirty="0"/>
-              <a:t> </a:t>
-            </a:r>
-            <a:r>
-              <a:rPr lang="en-US" dirty="0" err="1"/>
-              <a:t>vấn</a:t>
-            </a:r>
-            <a:r>
-              <a:rPr lang="en-US" dirty="0"/>
-              <a:t> </a:t>
-            </a:r>
-            <a:r>
-              <a:rPr lang="en-US" dirty="0" err="1"/>
-              <a:t>đề</a:t>
-            </a:r>
-            <a:r>
-              <a:rPr lang="en-US" dirty="0"/>
-              <a:t> </a:t>
-            </a:r>
-            <a:r>
-              <a:rPr lang="en-US" dirty="0" err="1"/>
-              <a:t>đó</a:t>
-            </a:r>
-            <a:r>
-              <a:rPr lang="en-US" dirty="0"/>
-              <a:t> </a:t>
-            </a:r>
-            <a:r>
-              <a:rPr lang="en-US" dirty="0" err="1"/>
-              <a:t>có</a:t>
-            </a:r>
-            <a:r>
-              <a:rPr lang="en-US" dirty="0"/>
-              <a:t> </a:t>
-            </a:r>
-            <a:r>
-              <a:rPr lang="en-US" dirty="0" err="1"/>
-              <a:t>định</a:t>
-            </a:r>
-            <a:r>
-              <a:rPr lang="en-US" dirty="0"/>
-              <a:t> </a:t>
-            </a:r>
-            <a:r>
-              <a:rPr lang="en-US" dirty="0" err="1"/>
-              <a:t>nghĩa</a:t>
-            </a:r>
-            <a:r>
-              <a:rPr lang="en-US" dirty="0"/>
-              <a:t> </a:t>
-            </a:r>
-            <a:r>
-              <a:rPr lang="en-US" dirty="0" err="1"/>
-              <a:t>như</a:t>
-            </a:r>
-            <a:r>
-              <a:rPr lang="en-US" dirty="0"/>
-              <a:t> </a:t>
-            </a:r>
-            <a:r>
-              <a:rPr lang="en-US" dirty="0" err="1"/>
-              <a:t>thế</a:t>
-            </a:r>
-            <a:r>
-              <a:rPr lang="en-US" dirty="0"/>
-              <a:t> </a:t>
-            </a:r>
-            <a:r>
-              <a:rPr lang="en-US" dirty="0" err="1"/>
-              <a:t>nào</a:t>
-            </a:r>
-            <a:r>
-              <a:rPr lang="en-US" dirty="0"/>
-              <a:t>?</a:t>
-            </a:r>
-          </a:p>
-        </p:txBody>
-      </p:sp>
-      <p:sp>
-        <p:nvSpPr>
-          <p:cNvPr id="6" name="TextBox 5">
-            <a:extLst>
-              <a:ext uri="{FF2B5EF4-FFF2-40B4-BE49-F238E27FC236}">
-                <a16:creationId xmlns:a16="http://schemas.microsoft.com/office/drawing/2014/main" id="{9B60FCF5-8FF2-45E5-95DE-DA62167EB769}"/>
-              </a:ext>
-            </a:extLst>
-          </p:cNvPr>
-          <p:cNvSpPr txBox="1"/>
-          <p:nvPr/>
-        </p:nvSpPr>
-        <p:spPr>
-          <a:xfrm>
-            <a:off x="3373120" y="5897263"/>
-            <a:ext cx="5445760" cy="646331"/>
-          </a:xfrm>
-          <a:prstGeom prst="rect">
-            <a:avLst/>
-          </a:prstGeom>
-          <a:noFill/>
-        </p:spPr>
-        <p:txBody>
-          <a:bodyPr wrap="square" rtlCol="0">
-            <a:spAutoFit/>
-          </a:bodyPr>
-          <a:lstStyle/>
-          <a:p>
-            <a:pPr algn="ctr"/>
-            <a:r>
-              <a:rPr lang="en-US" dirty="0"/>
-              <a:t>Figure 2: </a:t>
-            </a:r>
-            <a:r>
-              <a:rPr lang="en-US" dirty="0" err="1"/>
-              <a:t>Hình</a:t>
-            </a:r>
-            <a:r>
-              <a:rPr lang="en-US" dirty="0"/>
-              <a:t> </a:t>
-            </a:r>
-            <a:r>
-              <a:rPr lang="en-US" dirty="0" err="1"/>
-              <a:t>vẽ</a:t>
-            </a:r>
-            <a:r>
-              <a:rPr lang="en-US" dirty="0"/>
-              <a:t> </a:t>
-            </a:r>
-            <a:r>
-              <a:rPr lang="en-US" dirty="0" err="1"/>
-              <a:t>chỉ</a:t>
-            </a:r>
-            <a:r>
-              <a:rPr lang="en-US" dirty="0"/>
-              <a:t> ra chi </a:t>
-            </a:r>
-            <a:r>
-              <a:rPr lang="en-US" dirty="0" err="1"/>
-              <a:t>tiết</a:t>
-            </a:r>
-            <a:r>
-              <a:rPr lang="en-US" dirty="0"/>
-              <a:t> </a:t>
-            </a:r>
-            <a:r>
-              <a:rPr lang="en-US" dirty="0" err="1"/>
-              <a:t>quy</a:t>
-            </a:r>
-            <a:r>
-              <a:rPr lang="en-US" dirty="0"/>
-              <a:t> </a:t>
-            </a:r>
-            <a:r>
-              <a:rPr lang="en-US" dirty="0" err="1"/>
-              <a:t>mô</a:t>
-            </a:r>
-            <a:r>
-              <a:rPr lang="en-US" dirty="0"/>
-              <a:t> </a:t>
-            </a:r>
-            <a:r>
-              <a:rPr lang="en-US" dirty="0" err="1"/>
-              <a:t>và</a:t>
-            </a:r>
-            <a:r>
-              <a:rPr lang="en-US" dirty="0"/>
-              <a:t> </a:t>
-            </a:r>
-            <a:r>
-              <a:rPr lang="en-US" dirty="0" err="1"/>
-              <a:t>cả</a:t>
-            </a:r>
-            <a:r>
-              <a:rPr lang="en-US" dirty="0"/>
-              <a:t> </a:t>
-            </a:r>
-            <a:r>
-              <a:rPr lang="en-US" dirty="0" err="1"/>
-              <a:t>định</a:t>
-            </a:r>
-            <a:r>
-              <a:rPr lang="en-US" dirty="0"/>
-              <a:t> </a:t>
-            </a:r>
-            <a:r>
-              <a:rPr lang="en-US" dirty="0" err="1"/>
-              <a:t>nghĩa</a:t>
-            </a:r>
-            <a:r>
-              <a:rPr lang="en-US" dirty="0"/>
-              <a:t> </a:t>
-            </a:r>
-            <a:r>
-              <a:rPr lang="en-US" dirty="0" err="1"/>
-              <a:t>của</a:t>
-            </a:r>
-            <a:r>
-              <a:rPr lang="en-US" dirty="0"/>
-              <a:t> </a:t>
-            </a:r>
-            <a:r>
-              <a:rPr lang="en-US" dirty="0" err="1"/>
-              <a:t>vấn</a:t>
-            </a:r>
-            <a:r>
-              <a:rPr lang="en-US" dirty="0"/>
-              <a:t> </a:t>
-            </a:r>
-            <a:r>
-              <a:rPr lang="en-US" dirty="0" err="1"/>
-              <a:t>đề</a:t>
-            </a:r>
-            <a:r>
-              <a:rPr lang="en-US" dirty="0"/>
-              <a:t> </a:t>
-            </a:r>
-            <a:r>
-              <a:rPr lang="en-US" dirty="0" err="1"/>
-              <a:t>giải</a:t>
-            </a:r>
-            <a:r>
-              <a:rPr lang="en-US" dirty="0"/>
-              <a:t> </a:t>
-            </a:r>
-            <a:r>
-              <a:rPr lang="en-US" dirty="0" err="1"/>
-              <a:t>quyết</a:t>
-            </a:r>
-            <a:endParaRPr lang="en-US" dirty="0"/>
-          </a:p>
-        </p:txBody>
-      </p:sp>
-      <p:pic>
-        <p:nvPicPr>
-          <p:cNvPr id="8" name="Picture 7">
-            <a:extLst>
-              <a:ext uri="{FF2B5EF4-FFF2-40B4-BE49-F238E27FC236}">
-                <a16:creationId xmlns:a16="http://schemas.microsoft.com/office/drawing/2014/main" id="{FB0ADD6F-75A5-451E-9085-71D1EA20EC76}"/>
-              </a:ext>
-            </a:extLst>
-          </p:cNvPr>
-          <p:cNvPicPr>
-            <a:picLocks noChangeAspect="1"/>
-          </p:cNvPicPr>
-          <p:nvPr/>
-        </p:nvPicPr>
-        <p:blipFill>
-          <a:blip r:embed="rId2"/>
-          <a:stretch>
-            <a:fillRect/>
-          </a:stretch>
-        </p:blipFill>
-        <p:spPr>
-          <a:xfrm>
-            <a:off x="1850283" y="2859693"/>
-            <a:ext cx="8491433" cy="2902633"/>
-          </a:xfrm>
-          <a:prstGeom prst="rect">
-            <a:avLst/>
-          </a:prstGeom>
-        </p:spPr>
-      </p:pic>
-    </p:spTree>
-    <p:extLst>
-      <p:ext uri="{BB962C8B-B14F-4D97-AF65-F5344CB8AC3E}">
-        <p14:creationId xmlns:p14="http://schemas.microsoft.com/office/powerpoint/2010/main" val="1248271748"/>
-      </p:ext>
-    </p:extLst>
-  </p:cSld>
-  <p:clrMapOvr>
-    <a:masterClrMapping/>
-  </p:clrMapOvr>
-</p:sld>
-</file>
-
-<file path=ppt/slides/slide5.xml><?xml version="1.0" encoding="utf-8"?>
-<p:sld xmlns:a="http://schemas.openxmlformats.org/drawingml/2006/main" xmlns:r="http://schemas.openxmlformats.org/officeDocument/2006/relationships" xmlns:p="http://schemas.openxmlformats.org/presentationml/2006/main">
-  <p:cSld>
-    <p:spTree>
-      <p:nvGrpSpPr>
-        <p:cNvPr id="1" name=""/>
-        <p:cNvGrpSpPr/>
-        <p:nvPr/>
-      </p:nvGrpSpPr>
-      <p:grpSpPr>
-        <a:xfrm>
-          <a:off x="0" y="0"/>
-          <a:ext cx="0" cy="0"/>
-          <a:chOff x="0" y="0"/>
-          <a:chExt cx="0" cy="0"/>
-        </a:xfrm>
-      </p:grpSpPr>
-      <p:sp>
-        <p:nvSpPr>
-          <p:cNvPr id="2" name="Title 1">
-            <a:extLst>
-              <a:ext uri="{FF2B5EF4-FFF2-40B4-BE49-F238E27FC236}">
-                <a16:creationId xmlns:a16="http://schemas.microsoft.com/office/drawing/2014/main" id="{B3142B0A-216A-4893-9415-895A69E9C4BF}"/>
-              </a:ext>
-            </a:extLst>
-          </p:cNvPr>
-          <p:cNvSpPr>
-            <a:spLocks noGrp="1"/>
-          </p:cNvSpPr>
-          <p:nvPr>
-            <p:ph type="title"/>
-          </p:nvPr>
-        </p:nvSpPr>
-        <p:spPr/>
-        <p:txBody>
-          <a:bodyPr/>
-          <a:lstStyle/>
-          <a:p>
-            <a:r>
-              <a:rPr lang="en-US" dirty="0"/>
-              <a:t>Platform PoC</a:t>
-            </a:r>
-          </a:p>
-        </p:txBody>
-      </p:sp>
-      <p:sp>
-        <p:nvSpPr>
-          <p:cNvPr id="3" name="Content Placeholder 2">
-            <a:extLst>
-              <a:ext uri="{FF2B5EF4-FFF2-40B4-BE49-F238E27FC236}">
-                <a16:creationId xmlns:a16="http://schemas.microsoft.com/office/drawing/2014/main" id="{B2FF96FF-84F0-4A67-AE9F-4B8930BB64F9}"/>
-              </a:ext>
-            </a:extLst>
-          </p:cNvPr>
-          <p:cNvSpPr>
-            <a:spLocks noGrp="1"/>
-          </p:cNvSpPr>
-          <p:nvPr>
-            <p:ph idx="1"/>
-          </p:nvPr>
-        </p:nvSpPr>
-        <p:spPr/>
-        <p:txBody>
-          <a:bodyPr/>
-          <a:lstStyle/>
-          <a:p>
-            <a:r>
-              <a:rPr lang="en-US" dirty="0" err="1"/>
-              <a:t>Công</a:t>
-            </a:r>
-            <a:r>
-              <a:rPr lang="en-US" dirty="0"/>
-              <a:t> </a:t>
-            </a:r>
-            <a:r>
-              <a:rPr lang="en-US" dirty="0" err="1"/>
-              <a:t>nghệ</a:t>
-            </a:r>
-            <a:r>
-              <a:rPr lang="en-US" dirty="0"/>
-              <a:t> </a:t>
-            </a:r>
-            <a:r>
-              <a:rPr lang="en-US" dirty="0" err="1"/>
-              <a:t>và</a:t>
-            </a:r>
-            <a:r>
-              <a:rPr lang="en-US" dirty="0"/>
-              <a:t> repo </a:t>
-            </a:r>
-            <a:r>
-              <a:rPr lang="en-US" dirty="0" err="1"/>
-              <a:t>áp</a:t>
-            </a:r>
-            <a:r>
-              <a:rPr lang="en-US" dirty="0"/>
-              <a:t> </a:t>
-            </a:r>
-            <a:r>
-              <a:rPr lang="en-US" dirty="0" err="1"/>
-              <a:t>dụng</a:t>
-            </a:r>
-            <a:endParaRPr lang="en-US" dirty="0"/>
-          </a:p>
-        </p:txBody>
-      </p:sp>
-      <p:sp>
-        <p:nvSpPr>
-          <p:cNvPr id="6" name="TextBox 5">
-            <a:extLst>
-              <a:ext uri="{FF2B5EF4-FFF2-40B4-BE49-F238E27FC236}">
-                <a16:creationId xmlns:a16="http://schemas.microsoft.com/office/drawing/2014/main" id="{9B60FCF5-8FF2-45E5-95DE-DA62167EB769}"/>
-              </a:ext>
-            </a:extLst>
-          </p:cNvPr>
-          <p:cNvSpPr txBox="1"/>
-          <p:nvPr/>
-        </p:nvSpPr>
-        <p:spPr>
-          <a:xfrm>
-            <a:off x="3373120" y="5897263"/>
-            <a:ext cx="5445760" cy="646331"/>
-          </a:xfrm>
-          <a:prstGeom prst="rect">
-            <a:avLst/>
-          </a:prstGeom>
-          <a:noFill/>
-        </p:spPr>
-        <p:txBody>
-          <a:bodyPr wrap="square" rtlCol="0">
-            <a:spAutoFit/>
-          </a:bodyPr>
-          <a:lstStyle/>
-          <a:p>
-            <a:pPr algn="ctr"/>
-            <a:r>
-              <a:rPr lang="en-US" dirty="0"/>
-              <a:t>Figure 3: </a:t>
-            </a:r>
-            <a:r>
-              <a:rPr lang="en-US" dirty="0" err="1"/>
-              <a:t>Hình</a:t>
-            </a:r>
-            <a:r>
-              <a:rPr lang="en-US" dirty="0"/>
-              <a:t> </a:t>
-            </a:r>
-            <a:r>
-              <a:rPr lang="en-US" dirty="0" err="1"/>
-              <a:t>vẽ</a:t>
-            </a:r>
-            <a:r>
-              <a:rPr lang="en-US" dirty="0"/>
-              <a:t> </a:t>
-            </a:r>
-            <a:r>
-              <a:rPr lang="en-US" dirty="0" err="1"/>
-              <a:t>chỉ</a:t>
-            </a:r>
-            <a:r>
-              <a:rPr lang="en-US" dirty="0"/>
-              <a:t> ra chi </a:t>
-            </a:r>
-            <a:r>
-              <a:rPr lang="en-US" dirty="0" err="1"/>
-              <a:t>tiết</a:t>
-            </a:r>
-            <a:r>
-              <a:rPr lang="en-US" dirty="0"/>
-              <a:t> </a:t>
-            </a:r>
-            <a:r>
-              <a:rPr lang="en-US" dirty="0" err="1"/>
-              <a:t>quy</a:t>
-            </a:r>
-            <a:r>
-              <a:rPr lang="en-US" dirty="0"/>
-              <a:t> </a:t>
-            </a:r>
-            <a:r>
-              <a:rPr lang="en-US" dirty="0" err="1"/>
-              <a:t>mô</a:t>
-            </a:r>
-            <a:r>
-              <a:rPr lang="en-US" dirty="0"/>
-              <a:t> </a:t>
-            </a:r>
-            <a:r>
-              <a:rPr lang="en-US" dirty="0" err="1"/>
-              <a:t>và</a:t>
-            </a:r>
-            <a:r>
-              <a:rPr lang="en-US" dirty="0"/>
-              <a:t> </a:t>
-            </a:r>
-            <a:r>
-              <a:rPr lang="en-US" dirty="0" err="1"/>
-              <a:t>cả</a:t>
-            </a:r>
-            <a:r>
-              <a:rPr lang="en-US" dirty="0"/>
-              <a:t> </a:t>
-            </a:r>
-            <a:r>
-              <a:rPr lang="en-US" dirty="0" err="1"/>
-              <a:t>định</a:t>
-            </a:r>
-            <a:r>
-              <a:rPr lang="en-US" dirty="0"/>
-              <a:t> </a:t>
-            </a:r>
-            <a:r>
-              <a:rPr lang="en-US" dirty="0" err="1"/>
-              <a:t>nghĩa</a:t>
-            </a:r>
-            <a:r>
-              <a:rPr lang="en-US" dirty="0"/>
-              <a:t> </a:t>
-            </a:r>
-            <a:r>
-              <a:rPr lang="en-US" dirty="0" err="1"/>
-              <a:t>của</a:t>
-            </a:r>
-            <a:r>
-              <a:rPr lang="en-US" dirty="0"/>
-              <a:t> </a:t>
-            </a:r>
-            <a:r>
-              <a:rPr lang="en-US" dirty="0" err="1"/>
-              <a:t>vấn</a:t>
-            </a:r>
-            <a:r>
-              <a:rPr lang="en-US" dirty="0"/>
-              <a:t> </a:t>
-            </a:r>
-            <a:r>
-              <a:rPr lang="en-US" dirty="0" err="1"/>
-              <a:t>đề</a:t>
-            </a:r>
-            <a:r>
-              <a:rPr lang="en-US" dirty="0"/>
-              <a:t> </a:t>
-            </a:r>
-            <a:r>
-              <a:rPr lang="en-US" dirty="0" err="1"/>
-              <a:t>giải</a:t>
-            </a:r>
-            <a:r>
-              <a:rPr lang="en-US" dirty="0"/>
-              <a:t> </a:t>
-            </a:r>
-            <a:r>
-              <a:rPr lang="en-US" dirty="0" err="1"/>
-              <a:t>quyết</a:t>
-            </a:r>
+          <a:p>
+            <a:pPr algn="l">
+              <a:buFont typeface="+mj-lt"/>
+              <a:buAutoNum type="arabicPeriod"/>
+            </a:pPr>
+            <a:r>
+              <a:rPr lang="vi-VN" b="0" i="0" dirty="0">
+                <a:effectLst/>
+                <a:latin typeface="Calibri" panose="020F0502020204030204" pitchFamily="34" charset="0"/>
+                <a:cs typeface="Calibri" panose="020F0502020204030204" pitchFamily="34" charset="0"/>
+              </a:rPr>
+              <a:t>Python 3.12-3.13 (runtime chính).</a:t>
+            </a:r>
+          </a:p>
+          <a:p>
+            <a:pPr algn="l">
+              <a:buFont typeface="+mj-lt"/>
+              <a:buAutoNum type="arabicPeriod"/>
+            </a:pPr>
+            <a:r>
+              <a:rPr lang="vi-VN" b="0" i="0" dirty="0">
+                <a:effectLst/>
+                <a:latin typeface="Calibri" panose="020F0502020204030204" pitchFamily="34" charset="0"/>
+                <a:cs typeface="Calibri" panose="020F0502020204030204" pitchFamily="34" charset="0"/>
+              </a:rPr>
+              <a:t>CrewAI multi-agent orchestration.</a:t>
+            </a:r>
+          </a:p>
+          <a:p>
+            <a:pPr algn="l">
+              <a:buFont typeface="+mj-lt"/>
+              <a:buAutoNum type="arabicPeriod"/>
+            </a:pPr>
+            <a:r>
+              <a:rPr lang="vi-VN" b="0" i="0" dirty="0">
+                <a:effectLst/>
+                <a:latin typeface="Calibri" panose="020F0502020204030204" pitchFamily="34" charset="0"/>
+                <a:cs typeface="Calibri" panose="020F0502020204030204" pitchFamily="34" charset="0"/>
+              </a:rPr>
+              <a:t>LLM qua LiteLLM + Ollama local model openhermes.</a:t>
+            </a:r>
+          </a:p>
+          <a:p>
+            <a:pPr algn="l">
+              <a:buFont typeface="+mj-lt"/>
+              <a:buAutoNum type="arabicPeriod"/>
+            </a:pPr>
+            <a:r>
+              <a:rPr lang="vi-VN" b="0" i="0" dirty="0">
+                <a:effectLst/>
+                <a:latin typeface="Calibri" panose="020F0502020204030204" pitchFamily="34" charset="0"/>
+                <a:cs typeface="Calibri" panose="020F0502020204030204" pitchFamily="34" charset="0"/>
+              </a:rPr>
+              <a:t>Web scraping + parsing bằng requests, BeautifulSoup, Browserless adapter.</a:t>
+            </a:r>
+          </a:p>
+          <a:p>
+            <a:pPr algn="l">
+              <a:buFont typeface="+mj-lt"/>
+              <a:buAutoNum type="arabicPeriod"/>
+            </a:pPr>
+            <a:r>
+              <a:rPr lang="vi-VN" b="0" i="0" dirty="0">
+                <a:effectLst/>
+                <a:latin typeface="Calibri" panose="020F0502020204030204" pitchFamily="34" charset="0"/>
+                <a:cs typeface="Calibri" panose="020F0502020204030204" pitchFamily="34" charset="0"/>
+              </a:rPr>
+              <a:t>Semantic search nội bộ bằng sentence-transformers + vector store in-memory.</a:t>
+            </a:r>
+          </a:p>
+          <a:p>
+            <a:pPr algn="l">
+              <a:buFont typeface="+mj-lt"/>
+              <a:buAutoNum type="arabicPeriod"/>
+            </a:pPr>
+            <a:r>
+              <a:rPr lang="vi-VN" b="0" i="0" dirty="0">
+                <a:effectLst/>
+                <a:latin typeface="Calibri" panose="020F0502020204030204" pitchFamily="34" charset="0"/>
+                <a:cs typeface="Calibri" panose="020F0502020204030204" pitchFamily="34" charset="0"/>
+              </a:rPr>
+              <a:t>Có thêm nền tảng API/service dependency (FastAPI, APScheduler, email-validator).</a:t>
+            </a:r>
+          </a:p>
+          <a:p>
             <a:endParaRPr lang="en-US" dirty="0"/>
           </a:p>
         </p:txBody>
